--- a/draft/T10_Mutation_Testing_Slides.pptx
+++ b/draft/T10_Mutation_Testing_Slides.pptx
@@ -7293,7 +7293,7 @@
                 <a:cs typeface="Montserrat Italics"/>
                 <a:sym typeface="Montserrat Italics"/>
               </a:rPr>
-              <a:t>CS423/CSC15003</a:t>
+              <a:t>CS423/CSC13003</a:t>
             </a:r>
           </a:p>
         </p:txBody>
